--- a/slides/block3a.pptx
+++ b/slides/block3a.pptx
@@ -22,6 +22,7 @@
     <p:sldId id="270" r:id="rId22"/>
     <p:sldId id="271" r:id="rId23"/>
     <p:sldId id="272" r:id="rId24"/>
+    <p:sldId id="273" r:id="rId25"/>
   </p:sldIdLst>
   <p:sldSz cx="12192000" cy="6858000" type="screen4x3"/>
   <p:notesSz cx="6858000" cy="9144000"/>
@@ -518,7 +519,7 @@
           <a:lstStyle/>
           <a:p>
             <a:r>
-              <a:t>Block 1 taught them to classify a study. Block 2 gave them λ. This block is the machinery in between: how the ICER they are asked to believe is actually assembled, and therefore where it can go wrong. Say at the outset that this is the block their group's paper will be judged against.</a:t>
+              <a:t>Session 2 taught them to classify a study. This session starts taking one apart: the choices made before any arithmetic, and therefore where an ICER goes wrong before a single number is computed. Say at the outset that this is the session their group's paper will be judged against, and that the threshold question from this morning stays parked until Session 6.</a:t>
             </a:r>
           </a:p>
         </p:txBody>
@@ -938,7 +939,7 @@
           <a:lstStyle/>
           <a:p>
             <a:r>
-              <a:t>That last line is the bridge. Costs are the numerator of the ICER. Block 3B is about what goes underneath.</a:t>
+              <a:t>The point of this slide is that a well-framed clinical evaluation looks exactly like a well-framed programme evaluation. Two things to draw out. The perspective line is the abridged societal perspective in the wild, so they can recognise the phrase in a methods section. And row 4 is unusual and admirable: rather than pick a trial, the authors carried both through and reported both answers. Ask the groups whether their own paper names its effectiveness source at all.</a:t>
             </a:r>
           </a:p>
         </p:txBody>
@@ -1008,7 +1009,7 @@
           <a:lstStyle/>
           <a:p>
             <a:r>
-              <a:t>Not for reading out. The annotated version, with the other Block 3 sources, is in handouts/reading-list.html.</a:t>
+              <a:t>That last line is the bridge. They have just been told how costing should be done; Session 4 makes them do it for a service they actually run, which is where the principles stop being abstract. The denominator comes in Session 5.</a:t>
             </a:r>
           </a:p>
         </p:txBody>
@@ -1078,7 +1079,77 @@
           <a:lstStyle/>
           <a:p>
             <a:r>
-              <a:t>If there is a break here, set them one thing to think about: how would you put a number on a year of life in poor health? Let them try before you give them the QALY.</a:t>
+              <a:t>Not for reading out. The annotated version, with the rest of the day's sources, is in handouts/reading-list.html.</a:t>
+            </a:r>
+          </a:p>
+        </p:txBody>
+      </p:sp>
+      <p:sp>
+        <p:nvSpPr>
+          <p:cNvPr id="4" name="Slide Number Placeholder 3"/>
+          <p:cNvSpPr>
+            <a:spLocks noGrp="1"/>
+          </p:cNvSpPr>
+          <p:nvPr>
+            <p:ph type="sldNum" idx="5" sz="quarter"/>
+          </p:nvPr>
+        </p:nvSpPr>
+        <p:spPr/>
+      </p:sp>
+    </p:spTree>
+  </p:cSld>
+  <p:clrMapOvr>
+    <a:masterClrMapping/>
+  </p:clrMapOvr>
+</p:notes>
+</file>
+
+<file path=ppt/notesSlides/notesSlide18.xml><?xml version="1.0" encoding="utf-8"?>
+<p:notes xmlns:a="http://schemas.openxmlformats.org/drawingml/2006/main" xmlns:p="http://schemas.openxmlformats.org/presentationml/2006/main" xmlns:r="http://schemas.openxmlformats.org/officeDocument/2006/relationships">
+  <p:cSld>
+    <p:spTree>
+      <p:nvGrpSpPr>
+        <p:cNvPr id="1" name=""/>
+        <p:cNvGrpSpPr/>
+        <p:nvPr/>
+      </p:nvGrpSpPr>
+      <p:grpSpPr>
+        <a:xfrm>
+          <a:off x="0" y="0"/>
+          <a:ext cx="0" cy="0"/>
+          <a:chOff x="0" y="0"/>
+          <a:chExt cx="0" cy="0"/>
+        </a:xfrm>
+      </p:grpSpPr>
+      <p:sp>
+        <p:nvSpPr>
+          <p:cNvPr id="2" name="Slide Image Placeholder 1"/>
+          <p:cNvSpPr>
+            <a:spLocks noGrp="1"/>
+          </p:cNvSpPr>
+          <p:nvPr>
+            <p:ph type="sldImg" idx="2"/>
+          </p:nvPr>
+        </p:nvSpPr>
+        <p:spPr/>
+      </p:sp>
+      <p:sp>
+        <p:nvSpPr>
+          <p:cNvPr id="3" name="Notes Placeholder 2"/>
+          <p:cNvSpPr>
+            <a:spLocks noGrp="1"/>
+          </p:cNvSpPr>
+          <p:nvPr>
+            <p:ph type="body" idx="3" sz="quarter"/>
+          </p:nvPr>
+        </p:nvSpPr>
+        <p:spPr/>
+        <p:txBody>
+          <a:bodyPr/>
+          <a:lstStyle/>
+          <a:p>
+            <a:r>
+              <a:t>Over tea, ask them to pick the service they will cost: one clinic, one ward round, one diagnostic test. Choosing it in advance saves ten minutes of the next session.</a:t>
             </a:r>
           </a:p>
         </p:txBody>
@@ -1288,7 +1359,7 @@
           <a:lstStyle/>
           <a:p>
             <a:r>
-              <a:t>Connect this to Block 2's league table slide explicitly. They saw the symptom there. This is the cause, and it is why standards came before more studies.</a:t>
+              <a:t>Flag forward: Session 6 puts up India's league table, 79 studies ranked against each other. This slide is why that table cannot be read straight down the column. Tell them to remember it, and it is why standards came before more studies.</a:t>
             </a:r>
           </a:p>
         </p:txBody>
@@ -4682,7 +4753,7 @@
                 </a:solidFill>
                 <a:latin typeface="Arial"/>
               </a:rPr>
-              <a:t>ECONOMIC EVALUATION IN HEALTH · FACULTY WORKSHOP · SESSION 5</a:t>
+              <a:t>ECONOMIC EVALUATION IN HEALTH · FACULTY WORKSHOP · SESSION 3</a:t>
             </a:r>
           </a:p>
         </p:txBody>
@@ -7796,387 +7867,393 @@
                 </a:solidFill>
                 <a:latin typeface="Arial"/>
               </a:rPr>
-              <a:t>Recap</a:t>
-            </a:r>
-          </a:p>
-        </p:txBody>
-      </p:sp>
-      <p:sp>
-        <p:nvSpPr>
-          <p:cNvPr id="4" name="TextBox 3"/>
-          <p:cNvSpPr txBox="1"/>
-          <p:nvPr/>
-        </p:nvSpPr>
-        <p:spPr>
-          <a:xfrm>
-            <a:off x="1288703" y="1142050"/>
-            <a:ext cx="10350847" cy="479524"/>
-          </a:xfrm>
-          <a:prstGeom prst="rect">
-            <a:avLst/>
-          </a:prstGeom>
-          <a:noFill/>
-        </p:spPr>
-        <p:txBody>
-          <a:bodyPr wrap="square" lIns="0" rIns="0" tIns="0" bIns="0">
-            <a:spAutoFit/>
-          </a:bodyPr>
-          <a:lstStyle/>
-          <a:p>
-            <a:pPr algn="l">
-              <a:lnSpc>
-                <a:spcPct val="112500"/>
-              </a:lnSpc>
-              <a:spcAft>
-                <a:spcPts val="0"/>
-              </a:spcAft>
-              <a:buNone/>
-            </a:pPr>
-            <a:r>
-              <a:rPr sz="2800" b="0" i="0">
-                <a:solidFill>
-                  <a:srgbClr val="10141A"/>
-                </a:solidFill>
-                <a:latin typeface="Arial"/>
-              </a:rPr>
-              <a:t>The </a:t>
-            </a:r>
-            <a:r>
-              <a:rPr sz="2800" b="1" i="0">
-                <a:solidFill>
-                  <a:srgbClr val="10141A"/>
-                </a:solidFill>
-                <a:latin typeface="Arial"/>
-              </a:rPr>
-              <a:t>decision problem</a:t>
-            </a:r>
-            <a:r>
-              <a:rPr sz="2800" b="0" i="0">
-                <a:solidFill>
-                  <a:srgbClr val="10141A"/>
-                </a:solidFill>
-                <a:latin typeface="Arial"/>
-              </a:rPr>
-              <a:t> is six questions, not a title</a:t>
-            </a:r>
-          </a:p>
-        </p:txBody>
-      </p:sp>
-      <p:sp>
-        <p:nvSpPr>
-          <p:cNvPr id="5" name="TextBox 4"/>
-          <p:cNvSpPr txBox="1"/>
-          <p:nvPr/>
-        </p:nvSpPr>
-        <p:spPr>
-          <a:xfrm>
-            <a:off x="1288703" y="1763556"/>
-            <a:ext cx="10350847" cy="959048"/>
-          </a:xfrm>
-          <a:prstGeom prst="rect">
-            <a:avLst/>
-          </a:prstGeom>
-          <a:noFill/>
-        </p:spPr>
-        <p:txBody>
-          <a:bodyPr wrap="square" lIns="0" rIns="0" tIns="0" bIns="0">
-            <a:spAutoFit/>
-          </a:bodyPr>
-          <a:lstStyle/>
-          <a:p>
-            <a:pPr algn="l">
-              <a:lnSpc>
-                <a:spcPct val="112500"/>
-              </a:lnSpc>
-              <a:spcAft>
-                <a:spcPts val="0"/>
-              </a:spcAft>
-              <a:buNone/>
-            </a:pPr>
-            <a:r>
-              <a:rPr sz="2800" b="0" i="0">
-                <a:solidFill>
-                  <a:srgbClr val="10141A"/>
-                </a:solidFill>
-                <a:latin typeface="Arial"/>
-              </a:rPr>
-              <a:t>The </a:t>
-            </a:r>
-            <a:r>
-              <a:rPr sz="2800" b="1" i="0">
-                <a:solidFill>
-                  <a:srgbClr val="10141A"/>
-                </a:solidFill>
-                <a:latin typeface="Arial"/>
-              </a:rPr>
-              <a:t>comparator</a:t>
-            </a:r>
-            <a:r>
-              <a:rPr sz="2800" b="0" i="0">
-                <a:solidFill>
-                  <a:srgbClr val="10141A"/>
-                </a:solidFill>
-                <a:latin typeface="Arial"/>
-              </a:rPr>
-              <a:t> is current practice. A weak one flatters everything downstream</a:t>
-            </a:r>
-          </a:p>
-        </p:txBody>
-      </p:sp>
-      <p:sp>
-        <p:nvSpPr>
-          <p:cNvPr id="6" name="TextBox 5"/>
-          <p:cNvSpPr txBox="1"/>
-          <p:nvPr/>
-        </p:nvSpPr>
-        <p:spPr>
-          <a:xfrm>
-            <a:off x="1288703" y="2864587"/>
-            <a:ext cx="10350847" cy="479524"/>
-          </a:xfrm>
-          <a:prstGeom prst="rect">
-            <a:avLst/>
-          </a:prstGeom>
-          <a:noFill/>
-        </p:spPr>
-        <p:txBody>
-          <a:bodyPr wrap="square" lIns="0" rIns="0" tIns="0" bIns="0">
-            <a:spAutoFit/>
-          </a:bodyPr>
-          <a:lstStyle/>
-          <a:p>
-            <a:pPr algn="l">
-              <a:lnSpc>
-                <a:spcPct val="112500"/>
-              </a:lnSpc>
-              <a:spcAft>
-                <a:spcPts val="0"/>
-              </a:spcAft>
-              <a:buNone/>
-            </a:pPr>
-            <a:r>
-              <a:rPr sz="2800" b="0" i="0">
-                <a:solidFill>
-                  <a:srgbClr val="10141A"/>
-                </a:solidFill>
-                <a:latin typeface="Arial"/>
-              </a:rPr>
-              <a:t>India's default is </a:t>
-            </a:r>
-            <a:r>
-              <a:rPr sz="2800" b="1" i="0">
-                <a:solidFill>
-                  <a:srgbClr val="10141A"/>
-                </a:solidFill>
-                <a:latin typeface="Arial"/>
-              </a:rPr>
-              <a:t>abridged societal</a:t>
-            </a:r>
-            <a:r>
-              <a:rPr sz="2800" b="0" i="0">
-                <a:solidFill>
-                  <a:srgbClr val="10141A"/>
-                </a:solidFill>
-                <a:latin typeface="Arial"/>
-              </a:rPr>
-              <a:t>, payer view alongside</a:t>
-            </a:r>
-          </a:p>
-        </p:txBody>
-      </p:sp>
-      <p:sp>
-        <p:nvSpPr>
-          <p:cNvPr id="7" name="TextBox 6"/>
-          <p:cNvSpPr txBox="1"/>
-          <p:nvPr/>
-        </p:nvSpPr>
-        <p:spPr>
-          <a:xfrm>
-            <a:off x="1288703" y="3486093"/>
-            <a:ext cx="10350847" cy="479524"/>
-          </a:xfrm>
-          <a:prstGeom prst="rect">
-            <a:avLst/>
-          </a:prstGeom>
-          <a:noFill/>
-        </p:spPr>
-        <p:txBody>
-          <a:bodyPr wrap="square" lIns="0" rIns="0" tIns="0" bIns="0">
-            <a:spAutoFit/>
-          </a:bodyPr>
-          <a:lstStyle/>
-          <a:p>
-            <a:pPr algn="l">
-              <a:lnSpc>
-                <a:spcPct val="112500"/>
-              </a:lnSpc>
-              <a:spcAft>
-                <a:spcPts val="0"/>
-              </a:spcAft>
-              <a:buNone/>
-            </a:pPr>
-            <a:r>
-              <a:rPr sz="2800" b="0" i="0">
-                <a:solidFill>
-                  <a:srgbClr val="10141A"/>
-                </a:solidFill>
-                <a:latin typeface="Arial"/>
-              </a:rPr>
-              <a:t>Costs: </a:t>
-            </a:r>
-            <a:r>
-              <a:rPr sz="2800" b="1" i="0">
-                <a:solidFill>
-                  <a:srgbClr val="10141A"/>
-                </a:solidFill>
-                <a:latin typeface="Arial"/>
-              </a:rPr>
-              <a:t>identify, measure, value</a:t>
-            </a:r>
-            <a:r>
-              <a:rPr sz="2800" b="0" i="0">
-                <a:solidFill>
-                  <a:srgbClr val="10141A"/>
-                </a:solidFill>
-                <a:latin typeface="Arial"/>
-              </a:rPr>
-              <a:t>. Annuitise capital</a:t>
-            </a:r>
-          </a:p>
-        </p:txBody>
-      </p:sp>
-      <p:sp>
-        <p:nvSpPr>
-          <p:cNvPr id="8" name="TextBox 7"/>
-          <p:cNvSpPr txBox="1"/>
-          <p:nvPr/>
-        </p:nvSpPr>
-        <p:spPr>
-          <a:xfrm>
-            <a:off x="1288703" y="4107599"/>
-            <a:ext cx="10350847" cy="479524"/>
-          </a:xfrm>
-          <a:prstGeom prst="rect">
-            <a:avLst/>
-          </a:prstGeom>
-          <a:noFill/>
-        </p:spPr>
-        <p:txBody>
-          <a:bodyPr wrap="square" lIns="0" rIns="0" tIns="0" bIns="0">
-            <a:spAutoFit/>
-          </a:bodyPr>
-          <a:lstStyle/>
-          <a:p>
-            <a:pPr algn="l">
-              <a:lnSpc>
-                <a:spcPct val="112500"/>
-              </a:lnSpc>
-              <a:spcAft>
-                <a:spcPts val="0"/>
-              </a:spcAft>
-              <a:buNone/>
-            </a:pPr>
-            <a:r>
-              <a:rPr sz="2800" b="0" i="0">
-                <a:solidFill>
-                  <a:srgbClr val="10141A"/>
-                </a:solidFill>
-                <a:latin typeface="Arial"/>
-              </a:rPr>
-              <a:t>Check the </a:t>
-            </a:r>
-            <a:r>
-              <a:rPr sz="2800" b="1" i="0">
-                <a:solidFill>
-                  <a:srgbClr val="10141A"/>
-                </a:solidFill>
-                <a:latin typeface="Arial"/>
-              </a:rPr>
-              <a:t>National Health System Cost Database</a:t>
-            </a:r>
-            <a:r>
-              <a:rPr sz="2800" b="0" i="0">
-                <a:solidFill>
-                  <a:srgbClr val="10141A"/>
-                </a:solidFill>
-                <a:latin typeface="Arial"/>
-              </a:rPr>
-              <a:t> first</a:t>
-            </a:r>
-          </a:p>
-        </p:txBody>
-      </p:sp>
-      <p:sp>
-        <p:nvSpPr>
-          <p:cNvPr id="9" name="TextBox 8"/>
-          <p:cNvSpPr txBox="1"/>
-          <p:nvPr/>
-        </p:nvSpPr>
-        <p:spPr>
-          <a:xfrm>
-            <a:off x="1288703" y="4729105"/>
-            <a:ext cx="10350847" cy="479524"/>
-          </a:xfrm>
-          <a:prstGeom prst="rect">
-            <a:avLst/>
-          </a:prstGeom>
-          <a:noFill/>
-        </p:spPr>
-        <p:txBody>
-          <a:bodyPr wrap="square" lIns="0" rIns="0" tIns="0" bIns="0">
-            <a:spAutoFit/>
-          </a:bodyPr>
-          <a:lstStyle/>
-          <a:p>
-            <a:pPr algn="l">
-              <a:lnSpc>
-                <a:spcPct val="112500"/>
-              </a:lnSpc>
-              <a:spcAft>
-                <a:spcPts val="0"/>
-              </a:spcAft>
-              <a:buNone/>
-            </a:pPr>
-            <a:r>
-              <a:rPr sz="2800" b="0" i="0">
-                <a:solidFill>
-                  <a:srgbClr val="10141A"/>
-                </a:solidFill>
-                <a:latin typeface="Arial"/>
-              </a:rPr>
-              <a:t>The </a:t>
-            </a:r>
-            <a:r>
-              <a:rPr sz="2800" b="1" i="0">
-                <a:solidFill>
-                  <a:srgbClr val="10141A"/>
-                </a:solidFill>
-                <a:latin typeface="Arial"/>
-              </a:rPr>
-              <a:t>horizon</a:t>
-            </a:r>
-            <a:r>
-              <a:rPr sz="2800" b="0" i="0">
-                <a:solidFill>
-                  <a:srgbClr val="10141A"/>
-                </a:solidFill>
-                <a:latin typeface="Arial"/>
-              </a:rPr>
-              <a:t> must be long enough for benefits to arrive</a:t>
-            </a:r>
-          </a:p>
-        </p:txBody>
-      </p:sp>
-      <p:sp>
-        <p:nvSpPr>
-          <p:cNvPr id="10" name="Rectangle 9"/>
+              <a:t>The same framing, on a drug</a:t>
+            </a:r>
+          </a:p>
+        </p:txBody>
+      </p:sp>
+      <p:graphicFrame>
+        <p:nvGraphicFramePr>
+          <p:cNvPr id="4" name="Table 3"/>
+          <p:cNvGraphicFramePr>
+            <a:graphicFrameLocks noGrp="1"/>
+          </p:cNvGraphicFramePr>
+          <p:nvPr/>
+        </p:nvGraphicFramePr>
+        <p:xfrm>
+          <a:off x="552450" y="1162050"/>
+          <a:ext cx="11087100" cy="3155900"/>
+        </p:xfrm>
+        <a:graphic>
+          <a:graphicData uri="http://schemas.openxmlformats.org/drawingml/2006/table">
+            <a:tbl>
+              <a:tblPr firstRow="1">
+                <a:tableStyleId>{5C22544A-7EE6-4342-B048-85BDC9FD1C3A}</a:tableStyleId>
+              </a:tblPr>
+              <a:tblGrid>
+                <a:gridCol w="2695575"/>
+                <a:gridCol w="8391525"/>
+              </a:tblGrid>
+              <a:tr h="525983">
+                <a:tc>
+                  <a:txBody>
+                    <a:bodyPr wrap="square"/>
+                    <a:lstStyle/>
+                    <a:p>
+                      <a:pPr algn="l">
+                        <a:lnSpc>
+                          <a:spcPct val="104000"/>
+                        </a:lnSpc>
+                      </a:pPr>
+                      <a:r>
+                        <a:rPr sz="2010" b="1" i="0">
+                          <a:solidFill>
+                            <a:srgbClr val="FFFFFF"/>
+                          </a:solidFill>
+                          <a:latin typeface="Arial"/>
+                        </a:rPr>
+                        <a:t>Principle</a:t>
+                      </a:r>
+                    </a:p>
+                  </a:txBody>
+                  <a:tcPr marL="60000" marR="60000" marT="35000" marB="35000" anchor="t">
+                    <a:solidFill>
+                      <a:srgbClr val="162A6C"/>
+                    </a:solidFill>
+                  </a:tcPr>
+                </a:tc>
+                <a:tc>
+                  <a:txBody>
+                    <a:bodyPr wrap="square"/>
+                    <a:lstStyle/>
+                    <a:p>
+                      <a:pPr algn="l">
+                        <a:lnSpc>
+                          <a:spcPct val="104000"/>
+                        </a:lnSpc>
+                      </a:pPr>
+                      <a:r>
+                        <a:rPr sz="2010" b="1" i="0">
+                          <a:solidFill>
+                            <a:srgbClr val="FFFFFF"/>
+                          </a:solidFill>
+                          <a:latin typeface="Arial"/>
+                        </a:rPr>
+                        <a:t>What the trastuzumab evaluation chose</a:t>
+                      </a:r>
+                    </a:p>
+                  </a:txBody>
+                  <a:tcPr marL="60000" marR="60000" marT="35000" marB="35000" anchor="t">
+                    <a:solidFill>
+                      <a:srgbClr val="162A6C"/>
+                    </a:solidFill>
+                  </a:tcPr>
+                </a:tc>
+              </a:tr>
+              <a:tr h="525983">
+                <a:tc>
+                  <a:txBody>
+                    <a:bodyPr wrap="square"/>
+                    <a:lstStyle/>
+                    <a:p>
+                      <a:pPr algn="l">
+                        <a:lnSpc>
+                          <a:spcPct val="104000"/>
+                        </a:lnSpc>
+                      </a:pPr>
+                      <a:r>
+                        <a:rPr sz="2010" b="1" i="0">
+                          <a:solidFill>
+                            <a:srgbClr val="10141A"/>
+                          </a:solidFill>
+                          <a:latin typeface="Arial"/>
+                        </a:rPr>
+                        <a:t>1 Decision problem</a:t>
+                      </a:r>
+                    </a:p>
+                  </a:txBody>
+                  <a:tcPr marL="60000" marR="60000" marT="35000" marB="35000" anchor="t">
+                    <a:solidFill>
+                      <a:srgbClr val="F4F6F9"/>
+                    </a:solidFill>
+                  </a:tcPr>
+                </a:tc>
+                <a:tc>
+                  <a:txBody>
+                    <a:bodyPr wrap="square"/>
+                    <a:lstStyle/>
+                    <a:p>
+                      <a:pPr algn="l">
+                        <a:lnSpc>
+                          <a:spcPct val="104000"/>
+                        </a:lnSpc>
+                      </a:pPr>
+                      <a:r>
+                        <a:rPr sz="2010" b="0" i="0">
+                          <a:solidFill>
+                            <a:srgbClr val="10141A"/>
+                          </a:solidFill>
+                          <a:latin typeface="Arial"/>
+                        </a:rPr>
+                        <a:t>Add trastuzumab to chemotherapy in breast cancer, and for how long</a:t>
+                      </a:r>
+                    </a:p>
+                  </a:txBody>
+                  <a:tcPr marL="60000" marR="60000" marT="35000" marB="35000" anchor="t">
+                    <a:solidFill>
+                      <a:srgbClr val="F4F6F9"/>
+                    </a:solidFill>
+                  </a:tcPr>
+                </a:tc>
+              </a:tr>
+              <a:tr h="525983">
+                <a:tc>
+                  <a:txBody>
+                    <a:bodyPr wrap="square"/>
+                    <a:lstStyle/>
+                    <a:p>
+                      <a:pPr algn="l">
+                        <a:lnSpc>
+                          <a:spcPct val="104000"/>
+                        </a:lnSpc>
+                      </a:pPr>
+                      <a:r>
+                        <a:rPr sz="2010" b="1" i="0">
+                          <a:solidFill>
+                            <a:srgbClr val="10141A"/>
+                          </a:solidFill>
+                          <a:latin typeface="Arial"/>
+                        </a:rPr>
+                        <a:t>2 Comparator</a:t>
+                      </a:r>
+                    </a:p>
+                  </a:txBody>
+                  <a:tcPr marL="60000" marR="60000" marT="35000" marB="35000" anchor="t">
+                    <a:noFill/>
+                  </a:tcPr>
+                </a:tc>
+                <a:tc>
+                  <a:txBody>
+                    <a:bodyPr wrap="square"/>
+                    <a:lstStyle/>
+                    <a:p>
+                      <a:pPr algn="l">
+                        <a:lnSpc>
+                          <a:spcPct val="104000"/>
+                        </a:lnSpc>
+                      </a:pPr>
+                      <a:r>
+                        <a:rPr sz="2010" b="0" i="0">
+                          <a:solidFill>
+                            <a:srgbClr val="10141A"/>
+                          </a:solidFill>
+                          <a:latin typeface="Arial"/>
+                        </a:rPr>
+                        <a:t>Chemotherapy alone, against a year, six months and nine weeks of it</a:t>
+                      </a:r>
+                    </a:p>
+                  </a:txBody>
+                  <a:tcPr marL="60000" marR="60000" marT="35000" marB="35000" anchor="t">
+                    <a:noFill/>
+                  </a:tcPr>
+                </a:tc>
+              </a:tr>
+              <a:tr h="525983">
+                <a:tc>
+                  <a:txBody>
+                    <a:bodyPr wrap="square"/>
+                    <a:lstStyle/>
+                    <a:p>
+                      <a:pPr algn="l">
+                        <a:lnSpc>
+                          <a:spcPct val="104000"/>
+                        </a:lnSpc>
+                      </a:pPr>
+                      <a:r>
+                        <a:rPr sz="2010" b="1" i="0">
+                          <a:solidFill>
+                            <a:srgbClr val="10141A"/>
+                          </a:solidFill>
+                          <a:latin typeface="Arial"/>
+                        </a:rPr>
+                        <a:t>3 Perspective</a:t>
+                      </a:r>
+                    </a:p>
+                  </a:txBody>
+                  <a:tcPr marL="60000" marR="60000" marT="35000" marB="35000" anchor="t">
+                    <a:solidFill>
+                      <a:srgbClr val="F4F6F9"/>
+                    </a:solidFill>
+                  </a:tcPr>
+                </a:tc>
+                <a:tc>
+                  <a:txBody>
+                    <a:bodyPr wrap="square"/>
+                    <a:lstStyle/>
+                    <a:p>
+                      <a:pPr algn="l">
+                        <a:lnSpc>
+                          <a:spcPct val="104000"/>
+                        </a:lnSpc>
+                      </a:pPr>
+                      <a:r>
+                        <a:rPr sz="2010" b="0" i="0">
+                          <a:solidFill>
+                            <a:srgbClr val="10141A"/>
+                          </a:solidFill>
+                          <a:latin typeface="Arial"/>
+                        </a:rPr>
+                        <a:t>Societal, </a:t>
+                      </a:r>
+                      <a:r>
+                        <a:rPr sz="2010" b="0" i="1">
+                          <a:solidFill>
+                            <a:srgbClr val="10141A"/>
+                          </a:solidFill>
+                          <a:latin typeface="Arial"/>
+                        </a:rPr>
+                        <a:t>excluding indirect productivity losses</a:t>
+                      </a:r>
+                      <a:r>
+                        <a:rPr sz="2010" b="0" i="0">
+                          <a:solidFill>
+                            <a:srgbClr val="10141A"/>
+                          </a:solidFill>
+                          <a:latin typeface="Arial"/>
+                        </a:rPr>
+                        <a:t>: abridged societal</a:t>
+                      </a:r>
+                    </a:p>
+                  </a:txBody>
+                  <a:tcPr marL="60000" marR="60000" marT="35000" marB="35000" anchor="t">
+                    <a:solidFill>
+                      <a:srgbClr val="F4F6F9"/>
+                    </a:solidFill>
+                  </a:tcPr>
+                </a:tc>
+              </a:tr>
+              <a:tr h="525983">
+                <a:tc>
+                  <a:txBody>
+                    <a:bodyPr wrap="square"/>
+                    <a:lstStyle/>
+                    <a:p>
+                      <a:pPr algn="l">
+                        <a:lnSpc>
+                          <a:spcPct val="104000"/>
+                        </a:lnSpc>
+                      </a:pPr>
+                      <a:r>
+                        <a:rPr sz="2010" b="1" i="0">
+                          <a:solidFill>
+                            <a:srgbClr val="10141A"/>
+                          </a:solidFill>
+                          <a:latin typeface="Arial"/>
+                        </a:rPr>
+                        <a:t>4 Effectiveness</a:t>
+                      </a:r>
+                    </a:p>
+                  </a:txBody>
+                  <a:tcPr marL="60000" marR="60000" marT="35000" marB="35000" anchor="t">
+                    <a:noFill/>
+                  </a:tcPr>
+                </a:tc>
+                <a:tc>
+                  <a:txBody>
+                    <a:bodyPr wrap="square"/>
+                    <a:lstStyle/>
+                    <a:p>
+                      <a:pPr algn="l">
+                        <a:lnSpc>
+                          <a:spcPct val="104000"/>
+                        </a:lnSpc>
+                      </a:pPr>
+                      <a:r>
+                        <a:rPr sz="2010" b="0" i="0">
+                          <a:solidFill>
+                            <a:srgbClr val="10141A"/>
+                          </a:solidFill>
+                          <a:latin typeface="Arial"/>
+                        </a:rPr>
+                        <a:t>The HERA trial, and separately the joint NSABP and NCCTG analysis</a:t>
+                      </a:r>
+                    </a:p>
+                  </a:txBody>
+                  <a:tcPr marL="60000" marR="60000" marT="35000" marB="35000" anchor="t">
+                    <a:noFill/>
+                  </a:tcPr>
+                </a:tc>
+              </a:tr>
+              <a:tr h="525985">
+                <a:tc>
+                  <a:txBody>
+                    <a:bodyPr wrap="square"/>
+                    <a:lstStyle/>
+                    <a:p>
+                      <a:pPr algn="l">
+                        <a:lnSpc>
+                          <a:spcPct val="104000"/>
+                        </a:lnSpc>
+                      </a:pPr>
+                      <a:r>
+                        <a:rPr sz="2010" b="1" i="0">
+                          <a:solidFill>
+                            <a:srgbClr val="10141A"/>
+                          </a:solidFill>
+                          <a:latin typeface="Arial"/>
+                        </a:rPr>
+                        <a:t>5 Costs</a:t>
+                      </a:r>
+                    </a:p>
+                  </a:txBody>
+                  <a:tcPr marL="60000" marR="60000" marT="35000" marB="35000" anchor="t">
+                    <a:solidFill>
+                      <a:srgbClr val="F4F6F9"/>
+                    </a:solidFill>
+                  </a:tcPr>
+                </a:tc>
+                <a:tc>
+                  <a:txBody>
+                    <a:bodyPr wrap="square"/>
+                    <a:lstStyle/>
+                    <a:p>
+                      <a:pPr algn="l">
+                        <a:lnSpc>
+                          <a:spcPct val="104000"/>
+                        </a:lnSpc>
+                      </a:pPr>
+                      <a:r>
+                        <a:rPr sz="2010" b="0" i="0">
+                          <a:solidFill>
+                            <a:srgbClr val="10141A"/>
+                          </a:solidFill>
+                          <a:latin typeface="Arial"/>
+                        </a:rPr>
+                        <a:t>Standard treatment guidelines, real-world use from cancer registries</a:t>
+                      </a:r>
+                    </a:p>
+                  </a:txBody>
+                  <a:tcPr marL="60000" marR="60000" marT="35000" marB="35000" anchor="t">
+                    <a:solidFill>
+                      <a:srgbClr val="F4F6F9"/>
+                    </a:solidFill>
+                  </a:tcPr>
+                </a:tc>
+              </a:tr>
+            </a:tbl>
+          </a:graphicData>
+        </a:graphic>
+      </p:graphicFrame>
+      <p:sp>
+        <p:nvSpPr>
+          <p:cNvPr id="5" name="Rectangle 4"/>
           <p:cNvSpPr/>
           <p:nvPr/>
         </p:nvSpPr>
         <p:spPr>
           <a:xfrm>
-            <a:off x="552450" y="5370612"/>
-            <a:ext cx="11087100" cy="536674"/>
+            <a:off x="552450" y="4419600"/>
+            <a:ext cx="11087100" cy="1032867"/>
           </a:xfrm>
           <a:prstGeom prst="rect">
             <a:avLst/>
@@ -8211,20 +8288,20 @@
       </p:sp>
       <p:sp>
         <p:nvSpPr>
-          <p:cNvPr id="11" name="Rectangle 10"/>
+          <p:cNvPr id="6" name="Rectangle 5"/>
           <p:cNvSpPr/>
           <p:nvPr/>
         </p:nvSpPr>
         <p:spPr>
           <a:xfrm>
-            <a:off x="552450" y="5370612"/>
-            <a:ext cx="57150" cy="536674"/>
+            <a:off x="552450" y="4419600"/>
+            <a:ext cx="57150" cy="1032867"/>
           </a:xfrm>
           <a:prstGeom prst="rect">
             <a:avLst/>
           </a:prstGeom>
           <a:solidFill>
-            <a:srgbClr val="162A6C"/>
+            <a:srgbClr val="8A5A00"/>
           </a:solidFill>
           <a:ln>
             <a:noFill/>
@@ -8255,14 +8332,14 @@
       </p:sp>
       <p:sp>
         <p:nvSpPr>
-          <p:cNvPr id="12" name="TextBox 11"/>
+          <p:cNvPr id="7" name="TextBox 6"/>
           <p:cNvSpPr txBox="1"/>
           <p:nvPr/>
         </p:nvSpPr>
         <p:spPr>
           <a:xfrm>
-            <a:off x="776189" y="5370952"/>
-            <a:ext cx="10863361" cy="516334"/>
+            <a:off x="776189" y="4419940"/>
+            <a:ext cx="10863361" cy="1012527"/>
           </a:xfrm>
           <a:prstGeom prst="rect">
             <a:avLst/>
@@ -8291,7 +8368,112 @@
                 </a:solidFill>
                 <a:latin typeface="Arial"/>
               </a:rPr>
-              <a:t>All of that is the numerator. Next: the denominator.</a:t>
+              <a:t>Row 4 is two answers to one question. Session 5 shows what that did.</a:t>
+            </a:r>
+          </a:p>
+        </p:txBody>
+      </p:sp>
+      <p:sp>
+        <p:nvSpPr>
+          <p:cNvPr id="8" name="Rectangle 7"/>
+          <p:cNvSpPr/>
+          <p:nvPr/>
+        </p:nvSpPr>
+        <p:spPr>
+          <a:xfrm>
+            <a:off x="552450" y="5576739"/>
+            <a:ext cx="11087100" cy="9525"/>
+          </a:xfrm>
+          <a:prstGeom prst="rect">
+            <a:avLst/>
+          </a:prstGeom>
+          <a:solidFill>
+            <a:srgbClr val="CCD4DD"/>
+          </a:solidFill>
+          <a:ln>
+            <a:noFill/>
+          </a:ln>
+          <a:effectLst/>
+        </p:spPr>
+        <p:style>
+          <a:lnRef idx="1">
+            <a:schemeClr val="accent1"/>
+          </a:lnRef>
+          <a:fillRef idx="3">
+            <a:schemeClr val="accent1"/>
+          </a:fillRef>
+          <a:effectRef idx="2">
+            <a:schemeClr val="accent1"/>
+          </a:effectRef>
+          <a:fontRef idx="minor">
+            <a:schemeClr val="lt1"/>
+          </a:fontRef>
+        </p:style>
+        <p:txBody>
+          <a:bodyPr rtlCol="0" anchor="ctr"/>
+          <a:lstStyle/>
+          <a:p>
+            <a:pPr algn="ctr"/>
+          </a:p>
+        </p:txBody>
+      </p:sp>
+      <p:sp>
+        <p:nvSpPr>
+          <p:cNvPr id="9" name="TextBox 8"/>
+          <p:cNvSpPr txBox="1"/>
+          <p:nvPr/>
+        </p:nvSpPr>
+        <p:spPr>
+          <a:xfrm>
+            <a:off x="552450" y="5645559"/>
+            <a:ext cx="11087100" cy="258098"/>
+          </a:xfrm>
+          <a:prstGeom prst="rect">
+            <a:avLst/>
+          </a:prstGeom>
+          <a:noFill/>
+        </p:spPr>
+        <p:txBody>
+          <a:bodyPr wrap="square" lIns="0" rIns="0" tIns="0" bIns="0">
+            <a:spAutoFit/>
+          </a:bodyPr>
+          <a:lstStyle/>
+          <a:p>
+            <a:pPr algn="l">
+              <a:lnSpc>
+                <a:spcPct val="116700"/>
+              </a:lnSpc>
+              <a:spcAft>
+                <a:spcPts val="0"/>
+              </a:spcAft>
+              <a:buNone/>
+            </a:pPr>
+            <a:r>
+              <a:rPr sz="1400" b="0" i="0">
+                <a:solidFill>
+                  <a:srgbClr val="75808D"/>
+                </a:solidFill>
+                <a:latin typeface="Arial"/>
+              </a:rPr>
+              <a:t>Gupta, Verma, Gupta, Prinja, </a:t>
+            </a:r>
+            <a:r>
+              <a:rPr sz="1400" b="0" i="1">
+                <a:solidFill>
+                  <a:srgbClr val="75808D"/>
+                </a:solidFill>
+                <a:latin typeface="Arial"/>
+              </a:rPr>
+              <a:t>JCO Global Oncology</a:t>
+            </a:r>
+            <a:r>
+              <a:rPr sz="1400" b="0" i="0">
+                <a:solidFill>
+                  <a:srgbClr val="75808D"/>
+                </a:solidFill>
+                <a:latin typeface="Arial"/>
+              </a:rPr>
+              <a:t>, 2020.</a:t>
             </a:r>
           </a:p>
         </p:txBody>
@@ -8396,7 +8578,7 @@
                 </a:solidFill>
                 <a:latin typeface="Arial"/>
               </a:rPr>
-              <a:t>Sources</a:t>
+              <a:t>Recap</a:t>
             </a:r>
           </a:p>
         </p:txBody>
@@ -8409,8 +8591,8 @@
         </p:nvSpPr>
         <p:spPr>
           <a:xfrm>
-            <a:off x="1111002" y="1142050"/>
-            <a:ext cx="5068937" cy="3054548"/>
+            <a:off x="1288703" y="1142050"/>
+            <a:ext cx="10350847" cy="479524"/>
           </a:xfrm>
           <a:prstGeom prst="rect">
             <a:avLst/>
@@ -8423,144 +8605,41 @@
           </a:bodyPr>
           <a:lstStyle/>
           <a:p>
-            <a:pPr algn="l" marL="285750" indent="-285750">
+            <a:pPr algn="l">
               <a:lnSpc>
-                <a:spcPct val="120800"/>
+                <a:spcPct val="112500"/>
               </a:lnSpc>
               <a:spcAft>
-                <a:spcPts val="400"/>
+                <a:spcPts val="0"/>
               </a:spcAft>
-              <a:buAutoNum type="arabicPeriod"/>
+              <a:buNone/>
             </a:pPr>
             <a:r>
-              <a:rPr sz="1400" b="1" i="0">
+              <a:rPr sz="2800" b="0" i="0">
                 <a:solidFill>
                   <a:srgbClr val="10141A"/>
                 </a:solidFill>
                 <a:latin typeface="Arial"/>
               </a:rPr>
-              <a:t>Drummond MF, Sculpher MJ, Claxton K, Stoddart GL, Torrance GW.</a:t>
-            </a:r>
-            <a:r>
-              <a:rPr sz="1400" b="0" i="0">
-                <a:solidFill>
-                  <a:srgbClr val="47525F"/>
-                </a:solidFill>
-                <a:latin typeface="Arial"/>
-              </a:rPr>
-              <a:t> Methods for the Economic Evaluation of Health Care Programmes. 4th ed. Oxford University Press; 2015. </a:t>
-            </a:r>
-            <a:r>
-              <a:rPr sz="1400" b="1" i="0">
+              <a:t>The </a:t>
+            </a:r>
+            <a:r>
+              <a:rPr sz="2800" b="1" i="0">
                 <a:solidFill>
                   <a:srgbClr val="10141A"/>
                 </a:solidFill>
                 <a:latin typeface="Arial"/>
               </a:rPr>
-              <a:t>Chapter 4</a:t>
-            </a:r>
-            <a:r>
-              <a:rPr sz="1400" b="0" i="0">
-                <a:solidFill>
-                  <a:srgbClr val="47525F"/>
-                </a:solidFill>
-                <a:latin typeface="Arial"/>
-              </a:rPr>
-              <a:t>, pp. 77–123.</a:t>
-            </a:r>
-          </a:p>
-          <a:p>
-            <a:pPr algn="l" marL="285750" indent="-285750">
-              <a:lnSpc>
-                <a:spcPct val="120800"/>
-              </a:lnSpc>
-              <a:spcAft>
-                <a:spcPts val="400"/>
-              </a:spcAft>
-              <a:buAutoNum type="arabicPeriod" startAt="2"/>
-            </a:pPr>
-            <a:r>
-              <a:rPr sz="1400" b="1" i="0">
+              <a:t>decision problem</a:t>
+            </a:r>
+            <a:r>
+              <a:rPr sz="2800" b="0" i="0">
                 <a:solidFill>
                   <a:srgbClr val="10141A"/>
                 </a:solidFill>
                 <a:latin typeface="Arial"/>
               </a:rPr>
-              <a:t>Sharma D, Prinja S, Aggarwal AK, Rajsekar K, Bahuguna P.</a:t>
-            </a:r>
-            <a:r>
-              <a:rPr sz="1400" b="0" i="0">
-                <a:solidFill>
-                  <a:srgbClr val="47525F"/>
-                </a:solidFill>
-                <a:latin typeface="Arial"/>
-              </a:rPr>
-              <a:t> Development of the Indian Reference Case for undertaking economic evaluation for health technology assessment. </a:t>
-            </a:r>
-            <a:r>
-              <a:rPr sz="1400" b="0" i="1">
-                <a:solidFill>
-                  <a:srgbClr val="47525F"/>
-                </a:solidFill>
-                <a:latin typeface="Arial"/>
-              </a:rPr>
-              <a:t>Lancet Reg Health Southeast Asia</a:t>
-            </a:r>
-            <a:r>
-              <a:rPr sz="1400" b="0" i="0">
-                <a:solidFill>
-                  <a:srgbClr val="47525F"/>
-                </a:solidFill>
-                <a:latin typeface="Arial"/>
-              </a:rPr>
-              <a:t> 2023;16:100241. PMID 37694178</a:t>
-            </a:r>
-          </a:p>
-          <a:p>
-            <a:pPr algn="l" marL="285750" indent="-285750">
-              <a:lnSpc>
-                <a:spcPct val="120800"/>
-              </a:lnSpc>
-              <a:spcAft>
-                <a:spcPts val="400"/>
-              </a:spcAft>
-              <a:buAutoNum type="arabicPeriod" startAt="3"/>
-            </a:pPr>
-            <a:r>
-              <a:rPr sz="1400" b="1" i="0">
-                <a:solidFill>
-                  <a:srgbClr val="10141A"/>
-                </a:solidFill>
-                <a:latin typeface="Arial"/>
-              </a:rPr>
-              <a:t>Prinja S, Chauhan AS, Angell B, et al.</a:t>
-            </a:r>
-            <a:r>
-              <a:rPr sz="1400" b="0" i="0">
-                <a:solidFill>
-                  <a:srgbClr val="47525F"/>
-                </a:solidFill>
-                <a:latin typeface="Arial"/>
-              </a:rPr>
-              <a:t> A systematic review of the state of economic evaluation for health care in India. </a:t>
-            </a:r>
-            <a:r>
-              <a:rPr sz="1400" b="0" i="1">
-                <a:solidFill>
-                  <a:srgbClr val="47525F"/>
-                </a:solidFill>
-                <a:latin typeface="Arial"/>
-              </a:rPr>
-              <a:t>Appl Health Econ Health Policy</a:t>
-            </a:r>
-            <a:r>
-              <a:rPr sz="1400" b="0" i="0">
-                <a:solidFill>
-                  <a:srgbClr val="47525F"/>
-                </a:solidFill>
-                <a:latin typeface="Arial"/>
-              </a:rPr>
-              <a:t> 2015;13(6):595–613. PMID 26449485</a:t>
+              <a:t> is six questions, not a title</a:t>
             </a:r>
           </a:p>
         </p:txBody>
@@ -8573,8 +8652,8 @@
         </p:nvSpPr>
         <p:spPr>
           <a:xfrm>
-            <a:off x="6570613" y="1142050"/>
-            <a:ext cx="5068937" cy="2575024"/>
+            <a:off x="1288703" y="1763556"/>
+            <a:ext cx="10350847" cy="959048"/>
           </a:xfrm>
           <a:prstGeom prst="rect">
             <a:avLst/>
@@ -8587,126 +8666,414 @@
           </a:bodyPr>
           <a:lstStyle/>
           <a:p>
-            <a:pPr algn="l" marL="285750" indent="-285750">
+            <a:pPr algn="l">
               <a:lnSpc>
-                <a:spcPct val="120800"/>
+                <a:spcPct val="112500"/>
               </a:lnSpc>
               <a:spcAft>
-                <a:spcPts val="400"/>
+                <a:spcPts val="0"/>
               </a:spcAft>
-              <a:buAutoNum type="arabicPeriod" startAt="4"/>
+              <a:buNone/>
             </a:pPr>
             <a:r>
-              <a:rPr sz="1400" b="1" i="0">
+              <a:rPr sz="2800" b="0" i="0">
                 <a:solidFill>
                   <a:srgbClr val="10141A"/>
                 </a:solidFill>
                 <a:latin typeface="Arial"/>
               </a:rPr>
-              <a:t>Prinja S, Chauhan AS, Bahuguna P, et al.</a:t>
-            </a:r>
-            <a:r>
-              <a:rPr sz="1400" b="0" i="0">
-                <a:solidFill>
-                  <a:srgbClr val="47525F"/>
-                </a:solidFill>
-                <a:latin typeface="Arial"/>
-              </a:rPr>
-              <a:t> Cost of delivering secondary healthcare through the public sector in India. </a:t>
-            </a:r>
-            <a:r>
-              <a:rPr sz="1400" b="0" i="1">
-                <a:solidFill>
-                  <a:srgbClr val="47525F"/>
-                </a:solidFill>
-                <a:latin typeface="Arial"/>
-              </a:rPr>
-              <a:t>PharmacoEcon Open</a:t>
-            </a:r>
-            <a:r>
-              <a:rPr sz="1400" b="0" i="0">
-                <a:solidFill>
-                  <a:srgbClr val="47525F"/>
-                </a:solidFill>
-                <a:latin typeface="Arial"/>
-              </a:rPr>
-              <a:t> 2020;4(2):249–61. PMID 31468323</a:t>
-            </a:r>
-          </a:p>
-          <a:p>
-            <a:pPr algn="l" marL="285750" indent="-285750">
+              <a:t>The </a:t>
+            </a:r>
+            <a:r>
+              <a:rPr sz="2800" b="1" i="0">
+                <a:solidFill>
+                  <a:srgbClr val="10141A"/>
+                </a:solidFill>
+                <a:latin typeface="Arial"/>
+              </a:rPr>
+              <a:t>comparator</a:t>
+            </a:r>
+            <a:r>
+              <a:rPr sz="2800" b="0" i="0">
+                <a:solidFill>
+                  <a:srgbClr val="10141A"/>
+                </a:solidFill>
+                <a:latin typeface="Arial"/>
+              </a:rPr>
+              <a:t> is current practice. A weak one flatters everything downstream</a:t>
+            </a:r>
+          </a:p>
+        </p:txBody>
+      </p:sp>
+      <p:sp>
+        <p:nvSpPr>
+          <p:cNvPr id="6" name="TextBox 5"/>
+          <p:cNvSpPr txBox="1"/>
+          <p:nvPr/>
+        </p:nvSpPr>
+        <p:spPr>
+          <a:xfrm>
+            <a:off x="1288703" y="2864587"/>
+            <a:ext cx="10350847" cy="479524"/>
+          </a:xfrm>
+          <a:prstGeom prst="rect">
+            <a:avLst/>
+          </a:prstGeom>
+          <a:noFill/>
+        </p:spPr>
+        <p:txBody>
+          <a:bodyPr wrap="square" lIns="0" rIns="0" tIns="0" bIns="0">
+            <a:spAutoFit/>
+          </a:bodyPr>
+          <a:lstStyle/>
+          <a:p>
+            <a:pPr algn="l">
               <a:lnSpc>
-                <a:spcPct val="120800"/>
+                <a:spcPct val="112500"/>
               </a:lnSpc>
               <a:spcAft>
-                <a:spcPts val="400"/>
+                <a:spcPts val="0"/>
               </a:spcAft>
-              <a:buAutoNum type="arabicPeriod" startAt="5"/>
+              <a:buNone/>
             </a:pPr>
             <a:r>
-              <a:rPr sz="1400" b="1" i="0">
+              <a:rPr sz="2800" b="0" i="0">
                 <a:solidFill>
                   <a:srgbClr val="10141A"/>
                 </a:solidFill>
                 <a:latin typeface="Arial"/>
               </a:rPr>
-              <a:t>Prinja S, Gupta A, Verma R, Bahuguna P, et al.</a:t>
-            </a:r>
-            <a:r>
-              <a:rPr sz="1400" b="0" i="0">
-                <a:solidFill>
-                  <a:srgbClr val="47525F"/>
-                </a:solidFill>
-                <a:latin typeface="Arial"/>
-              </a:rPr>
-              <a:t> Cost of delivering health care services in public sector primary and community health centres in North India. </a:t>
-            </a:r>
-            <a:r>
-              <a:rPr sz="1400" b="0" i="1">
-                <a:solidFill>
-                  <a:srgbClr val="47525F"/>
-                </a:solidFill>
-                <a:latin typeface="Arial"/>
-              </a:rPr>
-              <a:t>PLoS One</a:t>
-            </a:r>
-            <a:r>
-              <a:rPr sz="1400" b="0" i="0">
-                <a:solidFill>
-                  <a:srgbClr val="47525F"/>
-                </a:solidFill>
-                <a:latin typeface="Arial"/>
-              </a:rPr>
-              <a:t> 2016;11(8):e0160986. PMID 27536781</a:t>
-            </a:r>
-          </a:p>
-          <a:p>
-            <a:pPr algn="l" marL="285750" indent="-285750">
+              <a:t>India's default is </a:t>
+            </a:r>
+            <a:r>
+              <a:rPr sz="2800" b="1" i="0">
+                <a:solidFill>
+                  <a:srgbClr val="10141A"/>
+                </a:solidFill>
+                <a:latin typeface="Arial"/>
+              </a:rPr>
+              <a:t>abridged societal</a:t>
+            </a:r>
+            <a:r>
+              <a:rPr sz="2800" b="0" i="0">
+                <a:solidFill>
+                  <a:srgbClr val="10141A"/>
+                </a:solidFill>
+                <a:latin typeface="Arial"/>
+              </a:rPr>
+              <a:t>, payer view alongside</a:t>
+            </a:r>
+          </a:p>
+        </p:txBody>
+      </p:sp>
+      <p:sp>
+        <p:nvSpPr>
+          <p:cNvPr id="7" name="TextBox 6"/>
+          <p:cNvSpPr txBox="1"/>
+          <p:nvPr/>
+        </p:nvSpPr>
+        <p:spPr>
+          <a:xfrm>
+            <a:off x="1288703" y="3486093"/>
+            <a:ext cx="10350847" cy="479524"/>
+          </a:xfrm>
+          <a:prstGeom prst="rect">
+            <a:avLst/>
+          </a:prstGeom>
+          <a:noFill/>
+        </p:spPr>
+        <p:txBody>
+          <a:bodyPr wrap="square" lIns="0" rIns="0" tIns="0" bIns="0">
+            <a:spAutoFit/>
+          </a:bodyPr>
+          <a:lstStyle/>
+          <a:p>
+            <a:pPr algn="l">
               <a:lnSpc>
-                <a:spcPct val="120800"/>
+                <a:spcPct val="112500"/>
               </a:lnSpc>
               <a:spcAft>
-                <a:spcPts val="400"/>
+                <a:spcPts val="0"/>
               </a:spcAft>
-              <a:buAutoNum type="arabicPeriod" startAt="6"/>
+              <a:buNone/>
             </a:pPr>
             <a:r>
-              <a:rPr sz="1400" b="1" i="0">
+              <a:rPr sz="2800" b="0" i="0">
                 <a:solidFill>
                   <a:srgbClr val="10141A"/>
                 </a:solidFill>
                 <a:latin typeface="Arial"/>
               </a:rPr>
-              <a:t>National Health System Cost Database for India.</a:t>
-            </a:r>
-            <a:r>
-              <a:rPr sz="1400" b="0" i="0">
-                <a:solidFill>
-                  <a:srgbClr val="47525F"/>
-                </a:solidFill>
-                <a:latin typeface="Arial"/>
-              </a:rPr>
-              <a:t> PGIMER Chandigarh and Department of Health Research. healtheconomics.pgisph.in/costing_web/</a:t>
+              <a:t>Costs: </a:t>
+            </a:r>
+            <a:r>
+              <a:rPr sz="2800" b="1" i="0">
+                <a:solidFill>
+                  <a:srgbClr val="10141A"/>
+                </a:solidFill>
+                <a:latin typeface="Arial"/>
+              </a:rPr>
+              <a:t>identify, measure, value</a:t>
+            </a:r>
+            <a:r>
+              <a:rPr sz="2800" b="0" i="0">
+                <a:solidFill>
+                  <a:srgbClr val="10141A"/>
+                </a:solidFill>
+                <a:latin typeface="Arial"/>
+              </a:rPr>
+              <a:t>. Annuitise capital</a:t>
+            </a:r>
+          </a:p>
+        </p:txBody>
+      </p:sp>
+      <p:sp>
+        <p:nvSpPr>
+          <p:cNvPr id="8" name="TextBox 7"/>
+          <p:cNvSpPr txBox="1"/>
+          <p:nvPr/>
+        </p:nvSpPr>
+        <p:spPr>
+          <a:xfrm>
+            <a:off x="1288703" y="4107599"/>
+            <a:ext cx="10350847" cy="479524"/>
+          </a:xfrm>
+          <a:prstGeom prst="rect">
+            <a:avLst/>
+          </a:prstGeom>
+          <a:noFill/>
+        </p:spPr>
+        <p:txBody>
+          <a:bodyPr wrap="square" lIns="0" rIns="0" tIns="0" bIns="0">
+            <a:spAutoFit/>
+          </a:bodyPr>
+          <a:lstStyle/>
+          <a:p>
+            <a:pPr algn="l">
+              <a:lnSpc>
+                <a:spcPct val="112500"/>
+              </a:lnSpc>
+              <a:spcAft>
+                <a:spcPts val="0"/>
+              </a:spcAft>
+              <a:buNone/>
+            </a:pPr>
+            <a:r>
+              <a:rPr sz="2800" b="0" i="0">
+                <a:solidFill>
+                  <a:srgbClr val="10141A"/>
+                </a:solidFill>
+                <a:latin typeface="Arial"/>
+              </a:rPr>
+              <a:t>Check the </a:t>
+            </a:r>
+            <a:r>
+              <a:rPr sz="2800" b="1" i="0">
+                <a:solidFill>
+                  <a:srgbClr val="10141A"/>
+                </a:solidFill>
+                <a:latin typeface="Arial"/>
+              </a:rPr>
+              <a:t>National Health System Cost Database</a:t>
+            </a:r>
+            <a:r>
+              <a:rPr sz="2800" b="0" i="0">
+                <a:solidFill>
+                  <a:srgbClr val="10141A"/>
+                </a:solidFill>
+                <a:latin typeface="Arial"/>
+              </a:rPr>
+              <a:t> first</a:t>
+            </a:r>
+          </a:p>
+        </p:txBody>
+      </p:sp>
+      <p:sp>
+        <p:nvSpPr>
+          <p:cNvPr id="9" name="TextBox 8"/>
+          <p:cNvSpPr txBox="1"/>
+          <p:nvPr/>
+        </p:nvSpPr>
+        <p:spPr>
+          <a:xfrm>
+            <a:off x="1288703" y="4729105"/>
+            <a:ext cx="10350847" cy="479524"/>
+          </a:xfrm>
+          <a:prstGeom prst="rect">
+            <a:avLst/>
+          </a:prstGeom>
+          <a:noFill/>
+        </p:spPr>
+        <p:txBody>
+          <a:bodyPr wrap="square" lIns="0" rIns="0" tIns="0" bIns="0">
+            <a:spAutoFit/>
+          </a:bodyPr>
+          <a:lstStyle/>
+          <a:p>
+            <a:pPr algn="l">
+              <a:lnSpc>
+                <a:spcPct val="112500"/>
+              </a:lnSpc>
+              <a:spcAft>
+                <a:spcPts val="0"/>
+              </a:spcAft>
+              <a:buNone/>
+            </a:pPr>
+            <a:r>
+              <a:rPr sz="2800" b="0" i="0">
+                <a:solidFill>
+                  <a:srgbClr val="10141A"/>
+                </a:solidFill>
+                <a:latin typeface="Arial"/>
+              </a:rPr>
+              <a:t>The </a:t>
+            </a:r>
+            <a:r>
+              <a:rPr sz="2800" b="1" i="0">
+                <a:solidFill>
+                  <a:srgbClr val="10141A"/>
+                </a:solidFill>
+                <a:latin typeface="Arial"/>
+              </a:rPr>
+              <a:t>horizon</a:t>
+            </a:r>
+            <a:r>
+              <a:rPr sz="2800" b="0" i="0">
+                <a:solidFill>
+                  <a:srgbClr val="10141A"/>
+                </a:solidFill>
+                <a:latin typeface="Arial"/>
+              </a:rPr>
+              <a:t> must be long enough for benefits to arrive</a:t>
+            </a:r>
+          </a:p>
+        </p:txBody>
+      </p:sp>
+      <p:sp>
+        <p:nvSpPr>
+          <p:cNvPr id="10" name="Rectangle 9"/>
+          <p:cNvSpPr/>
+          <p:nvPr/>
+        </p:nvSpPr>
+        <p:spPr>
+          <a:xfrm>
+            <a:off x="552450" y="5370612"/>
+            <a:ext cx="11087100" cy="1032867"/>
+          </a:xfrm>
+          <a:prstGeom prst="rect">
+            <a:avLst/>
+          </a:prstGeom>
+          <a:noFill/>
+          <a:ln>
+            <a:noFill/>
+          </a:ln>
+          <a:effectLst/>
+        </p:spPr>
+        <p:style>
+          <a:lnRef idx="1">
+            <a:schemeClr val="accent1"/>
+          </a:lnRef>
+          <a:fillRef idx="3">
+            <a:schemeClr val="accent1"/>
+          </a:fillRef>
+          <a:effectRef idx="2">
+            <a:schemeClr val="accent1"/>
+          </a:effectRef>
+          <a:fontRef idx="minor">
+            <a:schemeClr val="lt1"/>
+          </a:fontRef>
+        </p:style>
+        <p:txBody>
+          <a:bodyPr rtlCol="0" anchor="ctr"/>
+          <a:lstStyle/>
+          <a:p>
+            <a:pPr algn="ctr"/>
+          </a:p>
+        </p:txBody>
+      </p:sp>
+      <p:sp>
+        <p:nvSpPr>
+          <p:cNvPr id="11" name="Rectangle 10"/>
+          <p:cNvSpPr/>
+          <p:nvPr/>
+        </p:nvSpPr>
+        <p:spPr>
+          <a:xfrm>
+            <a:off x="552450" y="5370612"/>
+            <a:ext cx="57150" cy="1032867"/>
+          </a:xfrm>
+          <a:prstGeom prst="rect">
+            <a:avLst/>
+          </a:prstGeom>
+          <a:solidFill>
+            <a:srgbClr val="162A6C"/>
+          </a:solidFill>
+          <a:ln>
+            <a:noFill/>
+          </a:ln>
+          <a:effectLst/>
+        </p:spPr>
+        <p:style>
+          <a:lnRef idx="1">
+            <a:schemeClr val="accent1"/>
+          </a:lnRef>
+          <a:fillRef idx="3">
+            <a:schemeClr val="accent1"/>
+          </a:fillRef>
+          <a:effectRef idx="2">
+            <a:schemeClr val="accent1"/>
+          </a:effectRef>
+          <a:fontRef idx="minor">
+            <a:schemeClr val="lt1"/>
+          </a:fontRef>
+        </p:style>
+        <p:txBody>
+          <a:bodyPr rtlCol="0" anchor="ctr"/>
+          <a:lstStyle/>
+          <a:p>
+            <a:pPr algn="ctr"/>
+          </a:p>
+        </p:txBody>
+      </p:sp>
+      <p:sp>
+        <p:nvSpPr>
+          <p:cNvPr id="12" name="TextBox 11"/>
+          <p:cNvSpPr txBox="1"/>
+          <p:nvPr/>
+        </p:nvSpPr>
+        <p:spPr>
+          <a:xfrm>
+            <a:off x="776189" y="5370952"/>
+            <a:ext cx="10863361" cy="1012527"/>
+          </a:xfrm>
+          <a:prstGeom prst="rect">
+            <a:avLst/>
+          </a:prstGeom>
+          <a:noFill/>
+        </p:spPr>
+        <p:txBody>
+          <a:bodyPr wrap="square" lIns="0" rIns="0" tIns="0" bIns="0">
+            <a:spAutoFit/>
+          </a:bodyPr>
+          <a:lstStyle/>
+          <a:p>
+            <a:pPr algn="l">
+              <a:lnSpc>
+                <a:spcPct val="101700"/>
+              </a:lnSpc>
+              <a:spcAft>
+                <a:spcPts val="0"/>
+              </a:spcAft>
+              <a:buNone/>
+            </a:pPr>
+            <a:r>
+              <a:rPr sz="3200" b="1" i="0" spc="-32">
+                <a:solidFill>
+                  <a:srgbClr val="10141A"/>
+                </a:solidFill>
+                <a:latin typeface="Arial"/>
+              </a:rPr>
+              <a:t>All of that is the numerator, on paper. Next: the numerator, on your own ward.</a:t>
             </a:r>
           </a:p>
         </p:txBody>
@@ -8731,6 +9098,421 @@
       <p:grpSpPr/>
       <p:sp>
         <p:nvSpPr>
+          <p:cNvPr id="2" name="Rectangle 1"/>
+          <p:cNvSpPr/>
+          <p:nvPr/>
+        </p:nvSpPr>
+        <p:spPr>
+          <a:xfrm>
+            <a:off x="0" y="0"/>
+            <a:ext cx="12192000" cy="876300"/>
+          </a:xfrm>
+          <a:prstGeom prst="rect">
+            <a:avLst/>
+          </a:prstGeom>
+          <a:solidFill>
+            <a:srgbClr val="162A6C"/>
+          </a:solidFill>
+          <a:ln>
+            <a:noFill/>
+          </a:ln>
+          <a:effectLst/>
+        </p:spPr>
+        <p:style>
+          <a:lnRef idx="1">
+            <a:schemeClr val="accent1"/>
+          </a:lnRef>
+          <a:fillRef idx="3">
+            <a:schemeClr val="accent1"/>
+          </a:fillRef>
+          <a:effectRef idx="2">
+            <a:schemeClr val="accent1"/>
+          </a:effectRef>
+          <a:fontRef idx="minor">
+            <a:schemeClr val="lt1"/>
+          </a:fontRef>
+        </p:style>
+        <p:txBody>
+          <a:bodyPr rtlCol="0" anchor="ctr"/>
+          <a:lstStyle/>
+          <a:p>
+            <a:pPr algn="ctr"/>
+          </a:p>
+        </p:txBody>
+      </p:sp>
+      <p:sp>
+        <p:nvSpPr>
+          <p:cNvPr id="3" name="TextBox 2"/>
+          <p:cNvSpPr txBox="1"/>
+          <p:nvPr/>
+        </p:nvSpPr>
+        <p:spPr>
+          <a:xfrm>
+            <a:off x="552450" y="0"/>
+            <a:ext cx="11087100" cy="876300"/>
+          </a:xfrm>
+          <a:prstGeom prst="rect">
+            <a:avLst/>
+          </a:prstGeom>
+          <a:noFill/>
+        </p:spPr>
+        <p:txBody>
+          <a:bodyPr wrap="square" lIns="0" rIns="0" tIns="0" bIns="0" anchor="ctr">
+            <a:spAutoFit/>
+          </a:bodyPr>
+          <a:lstStyle/>
+          <a:p>
+            <a:pPr algn="l">
+              <a:lnSpc>
+                <a:spcPct val="93300"/>
+              </a:lnSpc>
+              <a:spcAft>
+                <a:spcPts val="0"/>
+              </a:spcAft>
+              <a:buNone/>
+            </a:pPr>
+            <a:r>
+              <a:rPr sz="3000" b="1" i="0" spc="-15">
+                <a:solidFill>
+                  <a:srgbClr val="FFFFFF"/>
+                </a:solidFill>
+                <a:latin typeface="Arial"/>
+              </a:rPr>
+              <a:t>Sources</a:t>
+            </a:r>
+          </a:p>
+        </p:txBody>
+      </p:sp>
+      <p:sp>
+        <p:nvSpPr>
+          <p:cNvPr id="4" name="TextBox 3"/>
+          <p:cNvSpPr txBox="1"/>
+          <p:nvPr/>
+        </p:nvSpPr>
+        <p:spPr>
+          <a:xfrm>
+            <a:off x="1111002" y="1142050"/>
+            <a:ext cx="5068937" cy="3054548"/>
+          </a:xfrm>
+          <a:prstGeom prst="rect">
+            <a:avLst/>
+          </a:prstGeom>
+          <a:noFill/>
+        </p:spPr>
+        <p:txBody>
+          <a:bodyPr wrap="square" lIns="0" rIns="0" tIns="0" bIns="0">
+            <a:spAutoFit/>
+          </a:bodyPr>
+          <a:lstStyle/>
+          <a:p>
+            <a:pPr algn="l" marL="285750" indent="-285750">
+              <a:lnSpc>
+                <a:spcPct val="120800"/>
+              </a:lnSpc>
+              <a:spcAft>
+                <a:spcPts val="400"/>
+              </a:spcAft>
+              <a:buAutoNum type="arabicPeriod"/>
+            </a:pPr>
+            <a:r>
+              <a:rPr sz="1400" b="1" i="0">
+                <a:solidFill>
+                  <a:srgbClr val="10141A"/>
+                </a:solidFill>
+                <a:latin typeface="Arial"/>
+              </a:rPr>
+              <a:t>Drummond MF, Sculpher MJ, Claxton K, Stoddart GL, Torrance GW.</a:t>
+            </a:r>
+            <a:r>
+              <a:rPr sz="1400" b="0" i="0">
+                <a:solidFill>
+                  <a:srgbClr val="47525F"/>
+                </a:solidFill>
+                <a:latin typeface="Arial"/>
+              </a:rPr>
+              <a:t> Methods for the Economic Evaluation of Health Care Programmes. 4th ed. Oxford University Press; 2015. </a:t>
+            </a:r>
+            <a:r>
+              <a:rPr sz="1400" b="1" i="0">
+                <a:solidFill>
+                  <a:srgbClr val="10141A"/>
+                </a:solidFill>
+                <a:latin typeface="Arial"/>
+              </a:rPr>
+              <a:t>Chapter 4</a:t>
+            </a:r>
+            <a:r>
+              <a:rPr sz="1400" b="0" i="0">
+                <a:solidFill>
+                  <a:srgbClr val="47525F"/>
+                </a:solidFill>
+                <a:latin typeface="Arial"/>
+              </a:rPr>
+              <a:t>, pp. 77–123.</a:t>
+            </a:r>
+          </a:p>
+          <a:p>
+            <a:pPr algn="l" marL="285750" indent="-285750">
+              <a:lnSpc>
+                <a:spcPct val="120800"/>
+              </a:lnSpc>
+              <a:spcAft>
+                <a:spcPts val="400"/>
+              </a:spcAft>
+              <a:buAutoNum type="arabicPeriod" startAt="2"/>
+            </a:pPr>
+            <a:r>
+              <a:rPr sz="1400" b="1" i="0">
+                <a:solidFill>
+                  <a:srgbClr val="10141A"/>
+                </a:solidFill>
+                <a:latin typeface="Arial"/>
+              </a:rPr>
+              <a:t>Sharma D, Prinja S, Aggarwal AK, Rajsekar K, Bahuguna P.</a:t>
+            </a:r>
+            <a:r>
+              <a:rPr sz="1400" b="0" i="0">
+                <a:solidFill>
+                  <a:srgbClr val="47525F"/>
+                </a:solidFill>
+                <a:latin typeface="Arial"/>
+              </a:rPr>
+              <a:t> Development of the Indian Reference Case for undertaking economic evaluation for health technology assessment. </a:t>
+            </a:r>
+            <a:r>
+              <a:rPr sz="1400" b="0" i="1">
+                <a:solidFill>
+                  <a:srgbClr val="47525F"/>
+                </a:solidFill>
+                <a:latin typeface="Arial"/>
+              </a:rPr>
+              <a:t>Lancet Reg Health Southeast Asia</a:t>
+            </a:r>
+            <a:r>
+              <a:rPr sz="1400" b="0" i="0">
+                <a:solidFill>
+                  <a:srgbClr val="47525F"/>
+                </a:solidFill>
+                <a:latin typeface="Arial"/>
+              </a:rPr>
+              <a:t> 2023;16:100241. PMID 37694178</a:t>
+            </a:r>
+          </a:p>
+          <a:p>
+            <a:pPr algn="l" marL="285750" indent="-285750">
+              <a:lnSpc>
+                <a:spcPct val="120800"/>
+              </a:lnSpc>
+              <a:spcAft>
+                <a:spcPts val="400"/>
+              </a:spcAft>
+              <a:buAutoNum type="arabicPeriod" startAt="3"/>
+            </a:pPr>
+            <a:r>
+              <a:rPr sz="1400" b="1" i="0">
+                <a:solidFill>
+                  <a:srgbClr val="10141A"/>
+                </a:solidFill>
+                <a:latin typeface="Arial"/>
+              </a:rPr>
+              <a:t>Prinja S, Chauhan AS, Angell B, et al.</a:t>
+            </a:r>
+            <a:r>
+              <a:rPr sz="1400" b="0" i="0">
+                <a:solidFill>
+                  <a:srgbClr val="47525F"/>
+                </a:solidFill>
+                <a:latin typeface="Arial"/>
+              </a:rPr>
+              <a:t> A systematic review of the state of economic evaluation for health care in India. </a:t>
+            </a:r>
+            <a:r>
+              <a:rPr sz="1400" b="0" i="1">
+                <a:solidFill>
+                  <a:srgbClr val="47525F"/>
+                </a:solidFill>
+                <a:latin typeface="Arial"/>
+              </a:rPr>
+              <a:t>Appl Health Econ Health Policy</a:t>
+            </a:r>
+            <a:r>
+              <a:rPr sz="1400" b="0" i="0">
+                <a:solidFill>
+                  <a:srgbClr val="47525F"/>
+                </a:solidFill>
+                <a:latin typeface="Arial"/>
+              </a:rPr>
+              <a:t> 2015;13(6):595–613. PMID 26449485</a:t>
+            </a:r>
+          </a:p>
+        </p:txBody>
+      </p:sp>
+      <p:sp>
+        <p:nvSpPr>
+          <p:cNvPr id="5" name="TextBox 4"/>
+          <p:cNvSpPr txBox="1"/>
+          <p:nvPr/>
+        </p:nvSpPr>
+        <p:spPr>
+          <a:xfrm>
+            <a:off x="6570613" y="1142050"/>
+            <a:ext cx="5068937" cy="2575024"/>
+          </a:xfrm>
+          <a:prstGeom prst="rect">
+            <a:avLst/>
+          </a:prstGeom>
+          <a:noFill/>
+        </p:spPr>
+        <p:txBody>
+          <a:bodyPr wrap="square" lIns="0" rIns="0" tIns="0" bIns="0">
+            <a:spAutoFit/>
+          </a:bodyPr>
+          <a:lstStyle/>
+          <a:p>
+            <a:pPr algn="l" marL="285750" indent="-285750">
+              <a:lnSpc>
+                <a:spcPct val="120800"/>
+              </a:lnSpc>
+              <a:spcAft>
+                <a:spcPts val="400"/>
+              </a:spcAft>
+              <a:buAutoNum type="arabicPeriod" startAt="4"/>
+            </a:pPr>
+            <a:r>
+              <a:rPr sz="1400" b="1" i="0">
+                <a:solidFill>
+                  <a:srgbClr val="10141A"/>
+                </a:solidFill>
+                <a:latin typeface="Arial"/>
+              </a:rPr>
+              <a:t>Prinja S, Chauhan AS, Bahuguna P, et al.</a:t>
+            </a:r>
+            <a:r>
+              <a:rPr sz="1400" b="0" i="0">
+                <a:solidFill>
+                  <a:srgbClr val="47525F"/>
+                </a:solidFill>
+                <a:latin typeface="Arial"/>
+              </a:rPr>
+              <a:t> Cost of delivering secondary healthcare through the public sector in India. </a:t>
+            </a:r>
+            <a:r>
+              <a:rPr sz="1400" b="0" i="1">
+                <a:solidFill>
+                  <a:srgbClr val="47525F"/>
+                </a:solidFill>
+                <a:latin typeface="Arial"/>
+              </a:rPr>
+              <a:t>PharmacoEcon Open</a:t>
+            </a:r>
+            <a:r>
+              <a:rPr sz="1400" b="0" i="0">
+                <a:solidFill>
+                  <a:srgbClr val="47525F"/>
+                </a:solidFill>
+                <a:latin typeface="Arial"/>
+              </a:rPr>
+              <a:t> 2020;4(2):249–61. PMID 31468323</a:t>
+            </a:r>
+          </a:p>
+          <a:p>
+            <a:pPr algn="l" marL="285750" indent="-285750">
+              <a:lnSpc>
+                <a:spcPct val="120800"/>
+              </a:lnSpc>
+              <a:spcAft>
+                <a:spcPts val="400"/>
+              </a:spcAft>
+              <a:buAutoNum type="arabicPeriod" startAt="5"/>
+            </a:pPr>
+            <a:r>
+              <a:rPr sz="1400" b="1" i="0">
+                <a:solidFill>
+                  <a:srgbClr val="10141A"/>
+                </a:solidFill>
+                <a:latin typeface="Arial"/>
+              </a:rPr>
+              <a:t>Prinja S, Gupta A, Verma R, Bahuguna P, et al.</a:t>
+            </a:r>
+            <a:r>
+              <a:rPr sz="1400" b="0" i="0">
+                <a:solidFill>
+                  <a:srgbClr val="47525F"/>
+                </a:solidFill>
+                <a:latin typeface="Arial"/>
+              </a:rPr>
+              <a:t> Cost of delivering health care services in public sector primary and community health centres in North India. </a:t>
+            </a:r>
+            <a:r>
+              <a:rPr sz="1400" b="0" i="1">
+                <a:solidFill>
+                  <a:srgbClr val="47525F"/>
+                </a:solidFill>
+                <a:latin typeface="Arial"/>
+              </a:rPr>
+              <a:t>PLoS One</a:t>
+            </a:r>
+            <a:r>
+              <a:rPr sz="1400" b="0" i="0">
+                <a:solidFill>
+                  <a:srgbClr val="47525F"/>
+                </a:solidFill>
+                <a:latin typeface="Arial"/>
+              </a:rPr>
+              <a:t> 2016;11(8):e0160986. PMID 27536781</a:t>
+            </a:r>
+          </a:p>
+          <a:p>
+            <a:pPr algn="l" marL="285750" indent="-285750">
+              <a:lnSpc>
+                <a:spcPct val="120800"/>
+              </a:lnSpc>
+              <a:spcAft>
+                <a:spcPts val="400"/>
+              </a:spcAft>
+              <a:buAutoNum type="arabicPeriod" startAt="6"/>
+            </a:pPr>
+            <a:r>
+              <a:rPr sz="1400" b="1" i="0">
+                <a:solidFill>
+                  <a:srgbClr val="10141A"/>
+                </a:solidFill>
+                <a:latin typeface="Arial"/>
+              </a:rPr>
+              <a:t>National Health System Cost Database for India.</a:t>
+            </a:r>
+            <a:r>
+              <a:rPr sz="1400" b="0" i="0">
+                <a:solidFill>
+                  <a:srgbClr val="47525F"/>
+                </a:solidFill>
+                <a:latin typeface="Arial"/>
+              </a:rPr>
+              <a:t> PGIMER Chandigarh and Department of Health Research. healtheconomics.pgisph.in/costing_web/</a:t>
+            </a:r>
+          </a:p>
+        </p:txBody>
+      </p:sp>
+    </p:spTree>
+  </p:cSld>
+  <p:clrMapOvr>
+    <a:masterClrMapping/>
+  </p:clrMapOvr>
+</p:sld>
+</file>
+
+<file path=ppt/slides/slide18.xml><?xml version="1.0" encoding="utf-8"?>
+<p:sld xmlns:a="http://schemas.openxmlformats.org/drawingml/2006/main" xmlns:p="http://schemas.openxmlformats.org/presentationml/2006/main" xmlns:r="http://schemas.openxmlformats.org/officeDocument/2006/relationships">
+  <p:cSld>
+    <p:spTree>
+      <p:nvGrpSpPr>
+        <p:cNvPr id="1" name=""/>
+        <p:cNvGrpSpPr/>
+        <p:nvPr/>
+      </p:nvGrpSpPr>
+      <p:grpSpPr/>
+      <p:sp>
+        <p:nvSpPr>
           <p:cNvPr id="2" name="TextBox 1"/>
           <p:cNvSpPr txBox="1"/>
           <p:nvPr/>
@@ -8767,7 +9549,7 @@
                 </a:solidFill>
                 <a:latin typeface="Arial"/>
               </a:rPr>
-              <a:t>FACULTY WORKSHOP · SESSION 6 · CHAPTER 4 CONTINUED</a:t>
+              <a:t>FACULTY WORKSHOP · SESSION 4 · COSTING, WITH A WORKSHEET</a:t>
             </a:r>
           </a:p>
         </p:txBody>
@@ -8810,7 +9592,7 @@
                 </a:solidFill>
                 <a:latin typeface="Arial"/>
               </a:rPr>
-              <a:t>Outcomes, discounting</a:t>
+              <a:t>Costing</a:t>
             </a:r>
           </a:p>
           <a:p>
@@ -8830,7 +9612,7 @@
                 </a:solidFill>
                 <a:latin typeface="Arial"/>
               </a:rPr>
-              <a:t>and the ICER</a:t>
+              <a:t>your own service</a:t>
             </a:r>
           </a:p>
         </p:txBody>
@@ -8844,7 +9626,7 @@
         <p:spPr>
           <a:xfrm>
             <a:off x="914400" y="2207808"/>
-            <a:ext cx="10363200" cy="1542157"/>
+            <a:ext cx="10363200" cy="1028105"/>
           </a:xfrm>
           <a:prstGeom prst="rect">
             <a:avLst/>
@@ -8873,7 +9655,7 @@
                 </a:solidFill>
                 <a:latin typeface="Arial"/>
               </a:rPr>
-              <a:t>What a QALY actually is. Why the future is worth less. And how three or more options get ranked: average versus incremental, dominance, extended dominance.</a:t>
+              <a:t>Identify, measure, value. On a service from your own department, with a worksheet, in the time it takes to drink tea.</a:t>
             </a:r>
           </a:p>
         </p:txBody>
@@ -8978,7 +9760,7 @@
                 </a:solidFill>
                 <a:latin typeface="Arial"/>
               </a:rPr>
-              <a:t>By the end of this block</a:t>
+              <a:t>By the end of this session</a:t>
             </a:r>
           </a:p>
         </p:txBody>
@@ -9413,7 +10195,7 @@
                 </a:solidFill>
                 <a:latin typeface="Arial"/>
               </a:rPr>
-              <a:t>Our spine for this block</a:t>
+              <a:t>Our spine for the rest of the day</a:t>
             </a:r>
           </a:p>
         </p:txBody>
@@ -9520,7 +10302,7 @@
                           </a:solidFill>
                           <a:latin typeface="Arial"/>
                         </a:rPr>
-                        <a:t>Block 3A</a:t>
+                        <a:t>Session 3, now</a:t>
                       </a:r>
                     </a:p>
                   </a:txBody>
@@ -9547,7 +10329,7 @@
                           </a:solidFill>
                           <a:latin typeface="Arial"/>
                         </a:rPr>
-                        <a:t>Block 3B</a:t>
+                        <a:t>Session 5</a:t>
                       </a:r>
                     </a:p>
                   </a:txBody>
@@ -9574,7 +10356,7 @@
                           </a:solidFill>
                           <a:latin typeface="Arial"/>
                         </a:rPr>
-                        <a:t>Block 3C</a:t>
+                        <a:t>Session 8</a:t>
                       </a:r>
                     </a:p>
                   </a:txBody>
@@ -12399,6 +13181,9 @@
                           <a:solidFill>
                             <a:srgbClr val="FFFFFF"/>
                           </a:solidFill>
+                          <a:highlight>
+                            <a:srgbClr val="17683C"/>
+                          </a:highlight>
                           <a:latin typeface="Arial"/>
                         </a:rPr>
                         <a:t>in</a:t>
@@ -12426,6 +13211,9 @@
                           <a:solidFill>
                             <a:srgbClr val="FFFFFF"/>
                           </a:solidFill>
+                          <a:highlight>
+                            <a:srgbClr val="17683C"/>
+                          </a:highlight>
                           <a:latin typeface="Arial"/>
                         </a:rPr>
                         <a:t>in</a:t>
@@ -12480,6 +13268,9 @@
                           <a:solidFill>
                             <a:srgbClr val="FFFFFF"/>
                           </a:solidFill>
+                          <a:highlight>
+                            <a:srgbClr val="A32217"/>
+                          </a:highlight>
                           <a:latin typeface="Arial"/>
                         </a:rPr>
                         <a:t>out</a:t>
@@ -12505,6 +13296,9 @@
                           <a:solidFill>
                             <a:srgbClr val="FFFFFF"/>
                           </a:solidFill>
+                          <a:highlight>
+                            <a:srgbClr val="17683C"/>
+                          </a:highlight>
                           <a:latin typeface="Arial"/>
                         </a:rPr>
                         <a:t>in</a:t>
@@ -12559,6 +13353,9 @@
                           <a:solidFill>
                             <a:srgbClr val="FFFFFF"/>
                           </a:solidFill>
+                          <a:highlight>
+                            <a:srgbClr val="A32217"/>
+                          </a:highlight>
                           <a:latin typeface="Arial"/>
                         </a:rPr>
                         <a:t>out</a:t>
@@ -12586,6 +13383,9 @@
                           <a:solidFill>
                             <a:srgbClr val="FFFFFF"/>
                           </a:solidFill>
+                          <a:highlight>
+                            <a:srgbClr val="17683C"/>
+                          </a:highlight>
                           <a:latin typeface="Arial"/>
                         </a:rPr>
                         <a:t>in</a:t>
@@ -12640,6 +13440,9 @@
                           <a:solidFill>
                             <a:srgbClr val="FFFFFF"/>
                           </a:solidFill>
+                          <a:highlight>
+                            <a:srgbClr val="A32217"/>
+                          </a:highlight>
                           <a:latin typeface="Arial"/>
                         </a:rPr>
                         <a:t>out</a:t>
@@ -12665,6 +13468,9 @@
                           <a:solidFill>
                             <a:srgbClr val="FFFFFF"/>
                           </a:solidFill>
+                          <a:highlight>
+                            <a:srgbClr val="8A5A00"/>
+                          </a:highlight>
                           <a:latin typeface="Arial"/>
                         </a:rPr>
                         <a:t>sensitivity only</a:t>
@@ -12719,6 +13525,9 @@
                           <a:solidFill>
                             <a:srgbClr val="FFFFFF"/>
                           </a:solidFill>
+                          <a:highlight>
+                            <a:srgbClr val="A32217"/>
+                          </a:highlight>
                           <a:latin typeface="Arial"/>
                         </a:rPr>
                         <a:t>out</a:t>
@@ -12746,6 +13555,9 @@
                           <a:solidFill>
                             <a:srgbClr val="FFFFFF"/>
                           </a:solidFill>
+                          <a:highlight>
+                            <a:srgbClr val="A32217"/>
+                          </a:highlight>
                           <a:latin typeface="Arial"/>
                         </a:rPr>
                         <a:t>out</a:t>

--- a/slides/block3a.pptx
+++ b/slides/block3a.pptx
@@ -6375,7 +6375,7 @@
         <p:spPr>
           <a:xfrm>
             <a:off x="552450" y="1162050"/>
-            <a:ext cx="11106150" cy="4114800"/>
+            <a:ext cx="11106150" cy="3733800"/>
           </a:xfrm>
           <a:prstGeom prst="rect">
             <a:avLst/>
@@ -6390,7 +6390,7 @@
         </p:nvSpPr>
         <p:spPr>
           <a:xfrm>
-            <a:off x="552450" y="5316828"/>
+            <a:off x="552450" y="4935828"/>
             <a:ext cx="11087100" cy="781645"/>
           </a:xfrm>
           <a:prstGeom prst="rect">
@@ -6487,7 +6487,7 @@
         </p:nvSpPr>
         <p:spPr>
           <a:xfrm>
-            <a:off x="552450" y="6258074"/>
+            <a:off x="552450" y="5950595"/>
             <a:ext cx="11087100" cy="9525"/>
           </a:xfrm>
           <a:prstGeom prst="rect">
@@ -6531,8 +6531,8 @@
         </p:nvSpPr>
         <p:spPr>
           <a:xfrm>
-            <a:off x="552450" y="6326894"/>
-            <a:ext cx="11087100" cy="258098"/>
+            <a:off x="552450" y="6196551"/>
+            <a:ext cx="10420350" cy="248692"/>
           </a:xfrm>
           <a:prstGeom prst="rect">
             <a:avLst/>
@@ -6575,6 +6575,30 @@
           </a:p>
         </p:txBody>
       </p:sp>
+      <p:pic>
+        <p:nvPicPr>
+          <p:cNvPr id="8" name="Picture 7" descr="block3a-12-1.png"/>
+          <p:cNvPicPr>
+            <a:picLocks noChangeAspect="1"/>
+          </p:cNvPicPr>
+          <p:nvPr/>
+        </p:nvPicPr>
+        <p:blipFill>
+          <a:blip r:embed="rId3"/>
+          <a:stretch>
+            <a:fillRect/>
+          </a:stretch>
+        </p:blipFill>
+        <p:spPr>
+          <a:xfrm>
+            <a:off x="11144250" y="6137672"/>
+            <a:ext cx="495300" cy="495300"/>
+          </a:xfrm>
+          <a:prstGeom prst="rect">
+            <a:avLst/>
+          </a:prstGeom>
+        </p:spPr>
+      </p:pic>
     </p:spTree>
   </p:cSld>
   <p:clrMapOvr>
